--- a/domain-seminars/week09_population_health.pptx
+++ b/domain-seminars/week09_population_health.pptx
@@ -506,7 +506,7 @@
           <a:lstStyle/>
           <a:p>
             <a:r>
-              <a:t>Domain seminar for week 9: Population Health Overview. It follows the course pattern: basics and terminology, where the topic sits in industry and policy, reform goals, how analytics is deployed, and how analytics drives decisions. Replace this note with your own opening remarks.</a:t>
+              <a:t>Domain seminar for week 9: Population Health Overview. We will go through basics and terminology, where the topic is found across industry and policy, reform goals, how analytics is deployed, and how analytics drives decisions. Provide opening remarks here.</a:t>
             </a:r>
           </a:p>
         </p:txBody>

--- a/domain-seminars/week09_population_health.pptx
+++ b/domain-seminars/week09_population_health.pptx
@@ -11,6 +11,7 @@
     <p:sldId id="269" r:id="rId20"/>
     <p:sldId id="270" r:id="rId21"/>
     <p:sldId id="271" r:id="rId22"/>
+    <p:sldId id="272" r:id="rId11"/>
   </p:sldIdLst>
   <p:notesMasterIdLst>
     <p:notesMasterId r:id="rId12"/>
@@ -857,6 +858,76 @@
           <a:p>
             <a:r>
               <a:t>When clinicians choose who gets a program, they usually choose sicker patients. Comparing enrolled with not-enrolled patients then mixes the program's effect with the patients' risk. Adjusting for risk factors measured before enrollment, or comparing changes over time against hospitals without the program (difference-in-differences), gets closer to the true effect.</a:t>
+            </a:r>
+          </a:p>
+        </p:txBody>
+      </p:sp>
+      <p:sp>
+        <p:nvSpPr>
+          <p:cNvPr id="4" name="Slide Number Placeholder 3"/>
+          <p:cNvSpPr>
+            <a:spLocks noGrp="1"/>
+          </p:cNvSpPr>
+          <p:nvPr>
+            <p:ph type="sldNum" idx="5" sz="quarter"/>
+          </p:nvPr>
+        </p:nvSpPr>
+        <p:spPr/>
+      </p:sp>
+    </p:spTree>
+  </p:cSld>
+  <p:clrMapOvr>
+    <a:masterClrMapping/>
+  </p:clrMapOvr>
+</p:notes>
+</file>
+
+<file path=ppt/notesSlides/notesSlide7.xml><?xml version="1.0" encoding="utf-8"?>
+<p:notes xmlns:a="http://schemas.openxmlformats.org/drawingml/2006/main" xmlns:p="http://schemas.openxmlformats.org/presentationml/2006/main" xmlns:r="http://schemas.openxmlformats.org/officeDocument/2006/relationships">
+  <p:cSld>
+    <p:spTree>
+      <p:nvGrpSpPr>
+        <p:cNvPr id="1" name=""/>
+        <p:cNvGrpSpPr/>
+        <p:nvPr/>
+      </p:nvGrpSpPr>
+      <p:grpSpPr>
+        <a:xfrm>
+          <a:off x="0" y="0"/>
+          <a:ext cx="0" cy="0"/>
+          <a:chOff x="0" y="0"/>
+          <a:chExt cx="0" cy="0"/>
+        </a:xfrm>
+      </p:grpSpPr>
+      <p:sp>
+        <p:nvSpPr>
+          <p:cNvPr id="2" name="Slide Image Placeholder 1"/>
+          <p:cNvSpPr>
+            <a:spLocks noGrp="1"/>
+          </p:cNvSpPr>
+          <p:nvPr>
+            <p:ph type="sldImg" idx="2"/>
+          </p:nvPr>
+        </p:nvSpPr>
+        <p:spPr/>
+      </p:sp>
+      <p:sp>
+        <p:nvSpPr>
+          <p:cNvPr id="3" name="Notes Placeholder 2"/>
+          <p:cNvSpPr>
+            <a:spLocks noGrp="1"/>
+          </p:cNvSpPr>
+          <p:nvPr>
+            <p:ph type="body" idx="3" sz="quarter"/>
+          </p:nvPr>
+        </p:nvSpPr>
+        <p:spPr/>
+        <p:txBody>
+          <a:bodyPr/>
+          <a:lstStyle/>
+          <a:p>
+            <a:r>
+              <a:t>Give students a few minutes to write an answer drawn from their own experience and career, then ask two or three to share. Connect their examples back to this seminar's content. In an online section, post the same question to the discussion board.</a:t>
             </a:r>
           </a:p>
         </p:txBody>
@@ -2572,6 +2643,167 @@
             <a:fld id="{F7021451-1387-4CA6-816F-3879F97B5CBC}" type="slidenum">
               <a:rPr b="0" lang="en-US"/>
               <a:t>6</a:t>
+            </a:fld>
+            <a:endParaRPr lang="en-US"/>
+          </a:p>
+        </p:txBody>
+      </p:sp>
+    </p:spTree>
+  </p:cSld>
+  <p:clrMapOvr>
+    <a:masterClrMapping/>
+  </p:clrMapOvr>
+</p:sld>
+</file>
+
+<file path=ppt/slides/slide7.xml><?xml version="1.0" encoding="utf-8"?>
+<p:sld xmlns:a="http://schemas.openxmlformats.org/drawingml/2006/main" xmlns:p="http://schemas.openxmlformats.org/presentationml/2006/main" xmlns:r="http://schemas.openxmlformats.org/officeDocument/2006/relationships">
+  <p:cSld>
+    <p:spTree>
+      <p:nvGrpSpPr>
+        <p:cNvPr id="1" name=""/>
+        <p:cNvGrpSpPr/>
+        <p:nvPr/>
+      </p:nvGrpSpPr>
+      <p:grpSpPr/>
+      <p:sp>
+        <p:nvSpPr>
+          <p:cNvPr id="2" name="Text 0"/>
+          <p:cNvSpPr/>
+          <p:nvPr>
+            <p:ph idx="100" type="title" hasCustomPrompt="1"/>
+          </p:nvPr>
+        </p:nvSpPr>
+        <p:spPr>
+          <a:xfrm>
+            <a:off x="731520" y="457200"/>
+            <a:ext cx="10698480" cy="822960"/>
+          </a:xfrm>
+          <a:prstGeom prst="rect">
+            <a:avLst/>
+          </a:prstGeom>
+          <a:noFill/>
+          <a:ln/>
+        </p:spPr>
+        <p:txBody>
+          <a:bodyPr wrap="square" lIns="0" tIns="0" rIns="0" bIns="0" rtlCol="0" anchor="t"/>
+          <a:lstStyle/>
+          <a:p>
+            <a:pPr algn="l" indent="0" marL="0">
+              <a:buNone/>
+            </a:pPr>
+            <a:r>
+              <a:rPr lang="en-US" sz="3200" b="1" dirty="0">
+                <a:solidFill>
+                  <a:srgbClr val="FFFFFF"/>
+                </a:solidFill>
+              </a:rPr>
+              <a:t>Discussion</a:t>
+            </a:r>
+            <a:endParaRPr lang="en-US" sz="3200" dirty="0"/>
+          </a:p>
+        </p:txBody>
+      </p:sp>
+      <p:sp>
+        <p:nvSpPr>
+          <p:cNvPr id="3" name="Text 0"/>
+          <p:cNvSpPr/>
+          <p:nvPr>
+            <p:ph idx="101" type="body" hasCustomPrompt="1"/>
+          </p:nvPr>
+        </p:nvSpPr>
+        <p:spPr>
+          <a:xfrm>
+            <a:off x="731520" y="1554480"/>
+            <a:ext cx="10698480" cy="4754880"/>
+          </a:xfrm>
+          <a:prstGeom prst="rect">
+            <a:avLst/>
+          </a:prstGeom>
+          <a:noFill/>
+          <a:ln/>
+        </p:spPr>
+        <p:txBody>
+          <a:bodyPr wrap="square" rtlCol="0" anchor="t"/>
+          <a:lstStyle/>
+          <a:p>
+            <a:pPr algn="l" marL="342900" indent="-342900">
+              <a:spcAft>
+                <a:spcPts val="1000"/>
+              </a:spcAft>
+              <a:buSzPct val="100000"/>
+              <a:buChar char="•"/>
+            </a:pPr>
+            <a:r>
+              <a:rPr lang="en-US" sz="2400" dirty="0">
+                <a:solidFill>
+                  <a:srgbClr val="FFFFFF"/>
+                </a:solidFill>
+              </a:rPr>
+              <a:t>Think of a program meant to improve outcomes for patients you've worked with. How would you tell whether it actually worked?</a:t>
+            </a:r>
+            <a:endParaRPr lang="en-US" sz="2400" dirty="0"/>
+          </a:p>
+          <a:p>
+            <a:pPr algn="l" marL="342900" indent="-342900">
+              <a:spcAft>
+                <a:spcPts val="1000"/>
+              </a:spcAft>
+              <a:buSzPct val="100000"/>
+              <a:buChar char="•"/>
+            </a:pPr>
+            <a:r>
+              <a:rPr lang="en-US" sz="2400" dirty="0">
+                <a:solidFill>
+                  <a:srgbClr val="FFFFFF"/>
+                </a:solidFill>
+              </a:rPr>
+              <a:t>Draw on your own experience and career, and apply today's seminar to that setting.</a:t>
+            </a:r>
+            <a:endParaRPr lang="en-US" sz="2400" dirty="0"/>
+          </a:p>
+        </p:txBody>
+      </p:sp>
+      <p:sp>
+        <p:nvSpPr>
+          <p:cNvPr id="25" name="Slide Number Placeholder 0"/>
+          <p:cNvSpPr>
+            <a:spLocks noGrp="1"/>
+          </p:cNvSpPr>
+          <p:nvPr>
+            <p:ph type="sldNum" sz="quarter" idx="4294967295"/>
+          </p:nvPr>
+        </p:nvSpPr>
+        <p:spPr>
+          <a:xfrm>
+            <a:off x="10972800" y="6400800"/>
+            <a:ext cx="548640" cy="274320"/>
+          </a:xfrm>
+          <a:prstGeom prst="rect">
+            <a:avLst/>
+          </a:prstGeom>
+          <a:extLst>
+            <a:ext uri="{C572A759-6A51-4108-AA02-DFA0A04FC94B}">
+              <ma14:wrappingTextBoxFlag xmlns:ma14="http://schemas.microsoft.com/office/mac/drawingml/2011/main" val="0"/>
+            </a:ext>
+          </a:extLst>
+        </p:spPr>
+        <p:txBody>
+          <a:bodyPr/>
+          <a:lstStyle>
+            <a:lvl1pPr>
+              <a:defRPr sz="1000">
+                <a:solidFill>
+                  <a:srgbClr val="BFBFBF"/>
+                </a:solidFill>
+              </a:defRPr>
+            </a:lvl1pPr>
+          </a:lstStyle>
+          <a:p>
+            <a:pPr algn="r"/>
+            <a:fld id="{F7021451-1387-4CA6-816F-3879F97B5CBC}" type="slidenum">
+              <a:rPr b="0" lang="en-US"/>
+              <a:t>7</a:t>
             </a:fld>
             <a:endParaRPr lang="en-US"/>
           </a:p>

--- a/domain-seminars/week09_population_health.pptx
+++ b/domain-seminars/week09_population_health.pptx
@@ -1619,7 +1619,7 @@
                   <a:srgbClr val="FFFFFF"/>
                 </a:solidFill>
               </a:rPr>
-              <a:t>Population Health Overview</a:t>
+              <a:t>Week 9: Population Health Overview</a:t>
             </a:r>
             <a:endParaRPr lang="en-US" sz="4000" dirty="0"/>
           </a:p>
